--- a/assets/powerpoints/module-n3-vetements/A3-les-couleurs-et-les-motifs.pptx
+++ b/assets/powerpoints/module-n3-vetements/A3-les-couleurs-et-les-motifs.pptx
@@ -11090,7 +11090,43 @@
                 </a:solidFill>
                 <a:latin typeface="Verdana"/>
               </a:rPr>
-              <a:t>un chandail &lt;b&gt;en&lt;/b&gt; laine, un chandail &lt;b&gt;de&lt;/b&gt; laine</a:t>
+              <a:t>un chandail </a:t>
+            </a:r>
+            <a:r>
+              <a:rPr sz="3400" b="1" i="0">
+                <a:solidFill>
+                  <a:srgbClr val="17181A"/>
+                </a:solidFill>
+                <a:latin typeface="Verdana"/>
+              </a:rPr>
+              <a:t>en</a:t>
+            </a:r>
+            <a:r>
+              <a:rPr sz="3400" b="0" i="0">
+                <a:solidFill>
+                  <a:srgbClr val="17181A"/>
+                </a:solidFill>
+                <a:latin typeface="Verdana"/>
+              </a:rPr>
+              <a:t> laine, un chandail </a:t>
+            </a:r>
+            <a:r>
+              <a:rPr sz="3400" b="1" i="0">
+                <a:solidFill>
+                  <a:srgbClr val="17181A"/>
+                </a:solidFill>
+                <a:latin typeface="Verdana"/>
+              </a:rPr>
+              <a:t>de</a:t>
+            </a:r>
+            <a:r>
+              <a:rPr sz="3400" b="0" i="0">
+                <a:solidFill>
+                  <a:srgbClr val="17181A"/>
+                </a:solidFill>
+                <a:latin typeface="Verdana"/>
+              </a:rPr>
+              <a:t> laine</a:t>
             </a:r>
           </a:p>
         </p:txBody>
@@ -11175,7 +11211,61 @@
                 </a:solidFill>
                 <a:latin typeface="Verdana"/>
               </a:rPr>
-              <a:t>Les deux se disent et veulent dire la même chose. Les trois matières à connaître pour l'hiver : le &lt;b&gt;coton&lt;/b&gt;, léger, qui ne réchauffe pas ; la &lt;b&gt;laine&lt;/b&gt;, chaude mais qui pique un peu ; le &lt;b&gt;nylon&lt;/b&gt;, qui coupe le vent et laisse passer le froid s'il n'est pas doublé.</a:t>
+              <a:t>Les deux se disent et veulent dire la même chose. Les trois matières à connaître pour l'hiver : le </a:t>
+            </a:r>
+            <a:r>
+              <a:rPr sz="2000" b="1" i="0">
+                <a:solidFill>
+                  <a:srgbClr val="4B4F52"/>
+                </a:solidFill>
+                <a:latin typeface="Verdana"/>
+              </a:rPr>
+              <a:t>coton</a:t>
+            </a:r>
+            <a:r>
+              <a:rPr sz="2000" b="0" i="0">
+                <a:solidFill>
+                  <a:srgbClr val="4B4F52"/>
+                </a:solidFill>
+                <a:latin typeface="Verdana"/>
+              </a:rPr>
+              <a:t>, léger, qui ne réchauffe pas ; la </a:t>
+            </a:r>
+            <a:r>
+              <a:rPr sz="2000" b="1" i="0">
+                <a:solidFill>
+                  <a:srgbClr val="4B4F52"/>
+                </a:solidFill>
+                <a:latin typeface="Verdana"/>
+              </a:rPr>
+              <a:t>laine</a:t>
+            </a:r>
+            <a:r>
+              <a:rPr sz="2000" b="0" i="0">
+                <a:solidFill>
+                  <a:srgbClr val="4B4F52"/>
+                </a:solidFill>
+                <a:latin typeface="Verdana"/>
+              </a:rPr>
+              <a:t>, chaude mais qui pique un peu ; le </a:t>
+            </a:r>
+            <a:r>
+              <a:rPr sz="2000" b="1" i="0">
+                <a:solidFill>
+                  <a:srgbClr val="4B4F52"/>
+                </a:solidFill>
+                <a:latin typeface="Verdana"/>
+              </a:rPr>
+              <a:t>nylon</a:t>
+            </a:r>
+            <a:r>
+              <a:rPr sz="2000" b="0" i="0">
+                <a:solidFill>
+                  <a:srgbClr val="4B4F52"/>
+                </a:solidFill>
+                <a:latin typeface="Verdana"/>
+              </a:rPr>
+              <a:t>, qui coupe le vent et laisse passer le froid s'il n'est pas doublé.</a:t>
             </a:r>
           </a:p>
         </p:txBody>
